--- a/tpt/018-dmp2-alchemy-architect/alchemy-architect-intro-deck.pptx
+++ b/tpt/018-dmp2-alchemy-architect/alchemy-architect-intro-deck.pptx
@@ -1149,7 +1149,7 @@
           <a:lstStyle/>
           <a:p>
             <a:r>
-              <a:t>Close with what my teacher notes say this project introduces: sound synthesis fundamentals. Every sound in electronic music was designed by someone, and now they know how to be that person. Invite students to keep saving patches and building their own sound library.</a:t>
+              <a:t>Close with what my teacher notes say this project introduces: sound synthesis fundamentals. Every sound in electronic music was designed by someone, and now they know how to be that person. Invite students to keep saving patches and building their own sound library. Reflection: point students to the Reflection page. A reflection is a written or oral conversation about how they did on the project and what they would do differently next time; they choose to write it or to talk it through with you.</a:t>
             </a:r>
           </a:p>
         </p:txBody>
@@ -11731,6 +11731,120 @@
           </a:prstGeom>
         </p:spPr>
       </p:pic>
+      <p:sp>
+        <p:nvSpPr>
+          <p:cNvPr id="19" name="Rounded Rectangle 18"/>
+          <p:cNvSpPr/>
+          <p:nvPr/>
+        </p:nvSpPr>
+        <p:spPr>
+          <a:xfrm>
+            <a:off x="548640" y="5349240"/>
+            <a:ext cx="5852160" cy="960120"/>
+          </a:xfrm>
+          <a:prstGeom prst="roundRect">
+            <a:avLst/>
+          </a:prstGeom>
+          <a:solidFill>
+            <a:srgbClr val="3A5F7D"/>
+          </a:solidFill>
+          <a:ln>
+            <a:noFill/>
+          </a:ln>
+          <a:effectLst/>
+        </p:spPr>
+        <p:style>
+          <a:lnRef idx="1">
+            <a:schemeClr val="accent1"/>
+          </a:lnRef>
+          <a:fillRef idx="3">
+            <a:schemeClr val="accent1"/>
+          </a:fillRef>
+          <a:effectRef idx="2">
+            <a:schemeClr val="accent1"/>
+          </a:effectRef>
+          <a:fontRef idx="minor">
+            <a:schemeClr val="lt1"/>
+          </a:fontRef>
+        </p:style>
+        <p:txBody>
+          <a:bodyPr rtlCol="0" anchor="ctr"/>
+          <a:lstStyle/>
+          <a:p>
+            <a:pPr algn="ctr"/>
+          </a:p>
+        </p:txBody>
+      </p:sp>
+      <p:sp>
+        <p:nvSpPr>
+          <p:cNvPr id="20" name="TextBox 19"/>
+          <p:cNvSpPr txBox="1"/>
+          <p:nvPr/>
+        </p:nvSpPr>
+        <p:spPr>
+          <a:xfrm>
+            <a:off x="731520" y="5394960"/>
+            <a:ext cx="5486400" cy="365760"/>
+          </a:xfrm>
+          <a:prstGeom prst="rect">
+            <a:avLst/>
+          </a:prstGeom>
+          <a:noFill/>
+        </p:spPr>
+        <p:txBody>
+          <a:bodyPr wrap="square" anchor="t" lIns="36576" rIns="36576" tIns="18288" bIns="18288">
+            <a:spAutoFit/>
+          </a:bodyPr>
+          <a:lstStyle/>
+          <a:p>
+            <a:pPr algn="l"/>
+            <a:r>
+              <a:rPr sz="2000" b="1">
+                <a:solidFill>
+                  <a:srgbClr val="FFFFFF"/>
+                </a:solidFill>
+                <a:latin typeface="Oswald"/>
+              </a:rPr>
+              <a:t>REFLECTION · PAGE 23</a:t>
+            </a:r>
+          </a:p>
+        </p:txBody>
+      </p:sp>
+      <p:sp>
+        <p:nvSpPr>
+          <p:cNvPr id="21" name="TextBox 20"/>
+          <p:cNvSpPr txBox="1"/>
+          <p:nvPr/>
+        </p:nvSpPr>
+        <p:spPr>
+          <a:xfrm>
+            <a:off x="731520" y="5760720"/>
+            <a:ext cx="5486400" cy="502920"/>
+          </a:xfrm>
+          <a:prstGeom prst="rect">
+            <a:avLst/>
+          </a:prstGeom>
+          <a:noFill/>
+        </p:spPr>
+        <p:txBody>
+          <a:bodyPr wrap="square" anchor="t" lIns="36576" rIns="36576" tIns="18288" bIns="18288">
+            <a:spAutoFit/>
+          </a:bodyPr>
+          <a:lstStyle/>
+          <a:p>
+            <a:pPr algn="l"/>
+            <a:r>
+              <a:rPr sz="1500" b="0">
+                <a:solidFill>
+                  <a:srgbClr val="FFFFFF"/>
+                </a:solidFill>
+                <a:latin typeface="Source Sans 3"/>
+              </a:rPr>
+              <a:t>Write it or talk it through: what went well, what was hard, what you would change.</a:t>
+            </a:r>
+          </a:p>
+        </p:txBody>
+      </p:sp>
     </p:spTree>
   </p:cSld>
   <p:clrMapOvr>
